--- a/slides-pptx/10-Python_intro-vsc-trainings.pptx
+++ b/slides-pptx/10-Python_intro-vsc-trainings.pptx
@@ -258,7 +258,7 @@
           <a:p>
             <a:fld id="{7A375BC9-5AAE-4E1F-9FAE-BC04149B1DB3}" type="datetimeFigureOut">
               <a:rPr lang="nl-BE" smtClean="0"/>
-              <a:t>14/10/2025</a:t>
+              <a:t>6/10/2026</a:t>
             </a:fld>
             <a:endParaRPr lang="nl-BE"/>
           </a:p>
@@ -657,7 +657,7 @@
           <a:p>
             <a:fld id="{25D4C14B-8B81-49E7-9BC7-8AE29B5E2ADB}" type="datetimeFigureOut">
               <a:rPr lang="nl-BE" smtClean="0"/>
-              <a:t>14/10/2025</a:t>
+              <a:t>6/10/2026</a:t>
             </a:fld>
             <a:endParaRPr lang="nl-BE"/>
           </a:p>
@@ -827,7 +827,7 @@
           <a:p>
             <a:fld id="{25D4C14B-8B81-49E7-9BC7-8AE29B5E2ADB}" type="datetimeFigureOut">
               <a:rPr lang="nl-BE" smtClean="0"/>
-              <a:t>14/10/2025</a:t>
+              <a:t>6/10/2026</a:t>
             </a:fld>
             <a:endParaRPr lang="nl-BE"/>
           </a:p>
@@ -1007,7 +1007,7 @@
           <a:p>
             <a:fld id="{25D4C14B-8B81-49E7-9BC7-8AE29B5E2ADB}" type="datetimeFigureOut">
               <a:rPr lang="nl-BE" smtClean="0"/>
-              <a:t>14/10/2025</a:t>
+              <a:t>6/10/2026</a:t>
             </a:fld>
             <a:endParaRPr lang="nl-BE"/>
           </a:p>
@@ -1177,7 +1177,7 @@
           <a:p>
             <a:fld id="{25D4C14B-8B81-49E7-9BC7-8AE29B5E2ADB}" type="datetimeFigureOut">
               <a:rPr lang="nl-BE" smtClean="0"/>
-              <a:t>14/10/2025</a:t>
+              <a:t>6/10/2026</a:t>
             </a:fld>
             <a:endParaRPr lang="nl-BE"/>
           </a:p>
@@ -1423,7 +1423,7 @@
           <a:p>
             <a:fld id="{25D4C14B-8B81-49E7-9BC7-8AE29B5E2ADB}" type="datetimeFigureOut">
               <a:rPr lang="nl-BE" smtClean="0"/>
-              <a:t>14/10/2025</a:t>
+              <a:t>6/10/2026</a:t>
             </a:fld>
             <a:endParaRPr lang="nl-BE"/>
           </a:p>
@@ -1655,7 +1655,7 @@
           <a:p>
             <a:fld id="{25D4C14B-8B81-49E7-9BC7-8AE29B5E2ADB}" type="datetimeFigureOut">
               <a:rPr lang="nl-BE" smtClean="0"/>
-              <a:t>14/10/2025</a:t>
+              <a:t>6/10/2026</a:t>
             </a:fld>
             <a:endParaRPr lang="nl-BE"/>
           </a:p>
@@ -2022,7 +2022,7 @@
           <a:p>
             <a:fld id="{25D4C14B-8B81-49E7-9BC7-8AE29B5E2ADB}" type="datetimeFigureOut">
               <a:rPr lang="nl-BE" smtClean="0"/>
-              <a:t>14/10/2025</a:t>
+              <a:t>6/10/2026</a:t>
             </a:fld>
             <a:endParaRPr lang="nl-BE"/>
           </a:p>
@@ -2140,7 +2140,7 @@
           <a:p>
             <a:fld id="{25D4C14B-8B81-49E7-9BC7-8AE29B5E2ADB}" type="datetimeFigureOut">
               <a:rPr lang="nl-BE" smtClean="0"/>
-              <a:t>14/10/2025</a:t>
+              <a:t>6/10/2026</a:t>
             </a:fld>
             <a:endParaRPr lang="nl-BE"/>
           </a:p>
@@ -2235,7 +2235,7 @@
           <a:p>
             <a:fld id="{25D4C14B-8B81-49E7-9BC7-8AE29B5E2ADB}" type="datetimeFigureOut">
               <a:rPr lang="nl-BE" smtClean="0"/>
-              <a:t>14/10/2025</a:t>
+              <a:t>6/10/2026</a:t>
             </a:fld>
             <a:endParaRPr lang="nl-BE"/>
           </a:p>
@@ -2512,7 +2512,7 @@
           <a:p>
             <a:fld id="{25D4C14B-8B81-49E7-9BC7-8AE29B5E2ADB}" type="datetimeFigureOut">
               <a:rPr lang="nl-BE" smtClean="0"/>
-              <a:t>14/10/2025</a:t>
+              <a:t>6/10/2026</a:t>
             </a:fld>
             <a:endParaRPr lang="nl-BE"/>
           </a:p>
@@ -2765,7 +2765,7 @@
           <a:p>
             <a:fld id="{25D4C14B-8B81-49E7-9BC7-8AE29B5E2ADB}" type="datetimeFigureOut">
               <a:rPr lang="nl-BE" smtClean="0"/>
-              <a:t>14/10/2025</a:t>
+              <a:t>6/10/2026</a:t>
             </a:fld>
             <a:endParaRPr lang="nl-BE"/>
           </a:p>
@@ -2978,7 +2978,7 @@
           <a:p>
             <a:fld id="{25D4C14B-8B81-49E7-9BC7-8AE29B5E2ADB}" type="datetimeFigureOut">
               <a:rPr lang="nl-BE" smtClean="0"/>
-              <a:t>14/10/2025</a:t>
+              <a:t>6/10/2026</a:t>
             </a:fld>
             <a:endParaRPr lang="nl-BE"/>
           </a:p>
@@ -3553,7 +3553,7 @@
           <a:p>
             <a:r>
               <a:rPr lang="en-US" dirty="0"/>
-              <a:t>But, learning opportunities are endless</a:t>
+              <a:t>Keep up-to-date with (latest/recent) Python releases</a:t>
             </a:r>
           </a:p>
           <a:p>
@@ -3614,26 +3614,16 @@
           <a:p>
             <a:r>
               <a:rPr lang="en-US" dirty="0"/>
-              <a:t>(Python and more) learning track</a:t>
-            </a:r>
-            <a:r>
-              <a:rPr lang="en-US"/>
-              <a:t>: </a:t>
+              <a:t>(Python and more) learning track: </a:t>
             </a:r>
             <a:br>
-              <a:rPr lang="en-US"/>
+              <a:rPr lang="en-US" dirty="0"/>
             </a:br>
-            <a:r>
-              <a:rPr lang="en-US">
-                <a:hlinkClick r:id="rId4"/>
-              </a:rPr>
-              <a:t>https</a:t>
-            </a:r>
             <a:r>
               <a:rPr lang="en-US" dirty="0">
                 <a:hlinkClick r:id="rId4"/>
               </a:rPr>
-              <a:t>://gjbex.github.io/Training-sessions/</a:t>
+              <a:t>https://gjbex.github.io/Training-sessions/</a:t>
             </a:r>
             <a:r>
               <a:rPr lang="en-US" dirty="0"/>
